--- a/7810 section2.pptx
+++ b/7810 section2.pptx
@@ -345,7 +345,7 @@
           <a:p>
             <a:fld id="{B7268E1E-0E44-426D-905E-8AD9B19D2182}" type="datetimeFigureOut">
               <a:rPr lang="cs-CZ" smtClean="0"/>
-              <a:t>18.03.2026</a:t>
+              <a:t>01.04.2026</a:t>
             </a:fld>
             <a:endParaRPr lang="cs-CZ"/>
           </a:p>
@@ -13068,7 +13068,7 @@
           <p:nvPr>
             <p:extLst>
               <p:ext uri="{D42A27DB-BD31-4B8C-83A1-F6EECF244321}">
-                <p14:modId xmlns:p14="http://schemas.microsoft.com/office/powerpoint/2010/main" val="1881242209"/>
+                <p14:modId xmlns:p14="http://schemas.microsoft.com/office/powerpoint/2010/main" val="592930950"/>
               </p:ext>
             </p:extLst>
           </p:nvPr>
@@ -13211,7 +13211,7 @@
                         <a:defRPr/>
                       </a:pPr>
                       <a:r>
-                        <a:rPr lang="en-US" sz="1400" b="1" i="0" u="none" strike="noStrike">
+                        <a:rPr lang="en-US" sz="1400" b="1" i="0" u="none" strike="noStrike" dirty="0">
                           <a:solidFill>
                             <a:srgbClr val="0D47A1"/>
                           </a:solidFill>
@@ -13222,7 +13222,7 @@
                         </a:rPr>
                         <a:t>Field Count</a:t>
                       </a:r>
-                      <a:endParaRPr lang="en-US" sz="1100"/>
+                      <a:endParaRPr lang="en-US" sz="1100" dirty="0"/>
                     </a:p>
                   </a:txBody>
                   <a:tcPr marL="101600" marR="101600" marT="101600" marB="101600">
@@ -13310,7 +13310,7 @@
                         <a:defRPr/>
                       </a:pPr>
                       <a:r>
-                        <a:rPr lang="en-US" sz="1400" b="0" i="0" u="none" strike="noStrike">
+                        <a:rPr lang="en-US" sz="1400" b="0" i="0" u="none" strike="noStrike" dirty="0">
                           <a:solidFill>
                             <a:srgbClr val="37474F"/>
                           </a:solidFill>
@@ -13319,9 +13319,21 @@
                           <a:cs typeface="Noto Sans SC"/>
                           <a:sym typeface="Noto Sans SC"/>
                         </a:rPr>
-                        <a:t>1,376</a:t>
+                        <a:t>1</a:t>
                       </a:r>
-                      <a:endParaRPr lang="en-US" sz="1100"/>
+                      <a:r>
+                        <a:rPr lang="en-US" altLang="zh-CN" sz="1400" b="0" i="0" u="none" strike="noStrike" dirty="0">
+                          <a:solidFill>
+                            <a:srgbClr val="37474F"/>
+                          </a:solidFill>
+                          <a:latin typeface="Noto Sans SC"/>
+                          <a:ea typeface="Noto Sans SC"/>
+                          <a:cs typeface="Noto Sans SC"/>
+                          <a:sym typeface="Noto Sans SC"/>
+                        </a:rPr>
+                        <a:t>6410</a:t>
+                      </a:r>
+                      <a:endParaRPr lang="en-US" sz="1100" dirty="0"/>
                     </a:p>
                   </a:txBody>
                   <a:tcPr marL="101600" marR="101600" marT="101600" marB="101600">
@@ -13356,7 +13368,7 @@
                         <a:defRPr/>
                       </a:pPr>
                       <a:r>
-                        <a:rPr lang="en-US" sz="1400" b="0" i="0" u="none" strike="noStrike">
+                        <a:rPr lang="en-US" sz="1400" b="0" i="0" u="none" strike="noStrike" dirty="0">
                           <a:solidFill>
                             <a:srgbClr val="37474F"/>
                           </a:solidFill>
@@ -13365,9 +13377,21 @@
                           <a:cs typeface="Noto Sans SC"/>
                           <a:sym typeface="Noto Sans SC"/>
                         </a:rPr>
-                        <a:t>38</a:t>
+                        <a:t>3</a:t>
                       </a:r>
-                      <a:endParaRPr lang="en-US" sz="1100"/>
+                      <a:r>
+                        <a:rPr lang="en-US" altLang="zh-CN" sz="1400" b="0" i="0" u="none" strike="noStrike" dirty="0">
+                          <a:solidFill>
+                            <a:srgbClr val="37474F"/>
+                          </a:solidFill>
+                          <a:latin typeface="Noto Sans SC"/>
+                          <a:ea typeface="Noto Sans SC"/>
+                          <a:cs typeface="Noto Sans SC"/>
+                          <a:sym typeface="Noto Sans SC"/>
+                        </a:rPr>
+                        <a:t>9</a:t>
+                      </a:r>
+                      <a:endParaRPr lang="en-US" sz="1100" dirty="0"/>
                     </a:p>
                   </a:txBody>
                   <a:tcPr marL="101600" marR="101600" marT="101600" marB="101600">
@@ -13455,18 +13479,16 @@
                         <a:defRPr/>
                       </a:pPr>
                       <a:r>
-                        <a:rPr lang="en-US" sz="1400" b="0" i="0" u="none" strike="noStrike">
+                        <a:rPr lang="en-US" altLang="zh-CN" sz="1400" b="0" i="0" u="none" strike="noStrike" dirty="0">
                           <a:solidFill>
                             <a:srgbClr val="37474F"/>
                           </a:solidFill>
                           <a:latin typeface="Noto Sans SC"/>
-                          <a:ea typeface="Noto Sans SC"/>
-                          <a:cs typeface="Noto Sans SC"/>
                           <a:sym typeface="Noto Sans SC"/>
                         </a:rPr>
-                        <a:t>1,250</a:t>
+                        <a:t>12682</a:t>
                       </a:r>
-                      <a:endParaRPr lang="en-US" sz="1100"/>
+                      <a:endParaRPr lang="en-US" sz="1100" dirty="0"/>
                     </a:p>
                   </a:txBody>
                   <a:tcPr marL="101600" marR="101600" marT="101600" marB="101600">
@@ -13501,7 +13523,7 @@
                         <a:defRPr/>
                       </a:pPr>
                       <a:r>
-                        <a:rPr lang="en-US" sz="1400" b="0" i="0" u="none" strike="noStrike">
+                        <a:rPr lang="en-US" sz="1400" b="0" i="0" u="none" strike="noStrike" dirty="0">
                           <a:solidFill>
                             <a:srgbClr val="37474F"/>
                           </a:solidFill>
@@ -13510,9 +13532,21 @@
                           <a:cs typeface="Noto Sans SC"/>
                           <a:sym typeface="Noto Sans SC"/>
                         </a:rPr>
-                        <a:t>38</a:t>
+                        <a:t>3</a:t>
                       </a:r>
-                      <a:endParaRPr lang="en-US" sz="1100"/>
+                      <a:r>
+                        <a:rPr lang="en-US" altLang="zh-CN" sz="1400" b="0" i="0" u="none" strike="noStrike" dirty="0">
+                          <a:solidFill>
+                            <a:srgbClr val="37474F"/>
+                          </a:solidFill>
+                          <a:latin typeface="Noto Sans SC"/>
+                          <a:ea typeface="Noto Sans SC"/>
+                          <a:cs typeface="Noto Sans SC"/>
+                          <a:sym typeface="Noto Sans SC"/>
+                        </a:rPr>
+                        <a:t>9</a:t>
+                      </a:r>
+                      <a:endParaRPr lang="en-US" sz="1100" dirty="0"/>
                     </a:p>
                   </a:txBody>
                   <a:tcPr marL="101600" marR="101600" marT="101600" marB="101600">
@@ -13600,18 +13634,16 @@
                         <a:defRPr/>
                       </a:pPr>
                       <a:r>
-                        <a:rPr lang="en-US" sz="1400" b="1" i="0" u="none" strike="noStrike">
+                        <a:rPr lang="en-US" altLang="zh-CN" sz="1400" b="1" i="0" u="none" strike="noStrike" dirty="0">
                           <a:solidFill>
                             <a:srgbClr val="0D47A1"/>
                           </a:solidFill>
                           <a:latin typeface="Noto Sans SC"/>
-                          <a:ea typeface="Noto Sans SC"/>
-                          <a:cs typeface="Noto Sans SC"/>
                           <a:sym typeface="Noto Sans SC"/>
                         </a:rPr>
-                        <a:t>2,626</a:t>
+                        <a:t>29092</a:t>
                       </a:r>
-                      <a:endParaRPr lang="en-US" sz="1100"/>
+                      <a:endParaRPr lang="en-US" sz="1100" dirty="0"/>
                     </a:p>
                   </a:txBody>
                   <a:tcPr marL="101600" marR="101600" marT="101600" marB="101600">
@@ -13655,7 +13687,19 @@
                           <a:cs typeface="Noto Sans SC"/>
                           <a:sym typeface="Noto Sans SC"/>
                         </a:rPr>
-                        <a:t>38</a:t>
+                        <a:t>3</a:t>
+                      </a:r>
+                      <a:r>
+                        <a:rPr lang="en-US" altLang="zh-CN" sz="1400" b="1" i="0" u="none" strike="noStrike" dirty="0">
+                          <a:solidFill>
+                            <a:srgbClr val="0D47A1"/>
+                          </a:solidFill>
+                          <a:latin typeface="Noto Sans SC"/>
+                          <a:ea typeface="Noto Sans SC"/>
+                          <a:cs typeface="Noto Sans SC"/>
+                          <a:sym typeface="Noto Sans SC"/>
+                        </a:rPr>
+                        <a:t>9</a:t>
                       </a:r>
                       <a:endParaRPr lang="en-US" sz="1100" dirty="0"/>
                     </a:p>
@@ -13868,11 +13912,17 @@
           <p:cNvGraphicFramePr>
             <a:graphicFrameLocks noGrp="1"/>
           </p:cNvGraphicFramePr>
-          <p:nvPr/>
+          <p:nvPr>
+            <p:extLst>
+              <p:ext uri="{D42A27DB-BD31-4B8C-83A1-F6EECF244321}">
+                <p14:modId xmlns:p14="http://schemas.microsoft.com/office/powerpoint/2010/main" val="3466053909"/>
+              </p:ext>
+            </p:extLst>
+          </p:nvPr>
         </p:nvGraphicFramePr>
         <p:xfrm>
-          <a:off x="6604000" y="2286000"/>
-          <a:ext cx="4572000" cy="1605280"/>
+          <a:off x="6477000" y="2204720"/>
+          <a:ext cx="4572000" cy="1772920"/>
         </p:xfrm>
         <a:graphic>
           <a:graphicData uri="http://schemas.openxmlformats.org/drawingml/2006/table">
@@ -14107,18 +14157,16 @@
                         <a:defRPr/>
                       </a:pPr>
                       <a:r>
-                        <a:rPr lang="en-US" sz="1300" b="0" i="0" u="none" strike="noStrike">
+                        <a:rPr lang="en-US" altLang="zh-CN" sz="1300" b="0" i="0" u="none" strike="noStrike" dirty="0">
                           <a:solidFill>
                             <a:srgbClr val="37474F"/>
                           </a:solidFill>
                           <a:latin typeface="Noto Sans SC"/>
-                          <a:ea typeface="Noto Sans SC"/>
-                          <a:cs typeface="Noto Sans SC"/>
                           <a:sym typeface="Noto Sans SC"/>
                         </a:rPr>
-                        <a:t>2,512</a:t>
+                        <a:t>23233</a:t>
                       </a:r>
-                      <a:endParaRPr lang="en-US" sz="1100"/>
+                      <a:endParaRPr lang="en-US" sz="1100" dirty="0"/>
                     </a:p>
                   </a:txBody>
                   <a:tcPr marL="101600" marR="101600" marT="101600" marB="101600">
@@ -14153,18 +14201,16 @@
                         <a:defRPr/>
                       </a:pPr>
                       <a:r>
-                        <a:rPr lang="en-US" sz="1300" b="1" i="0" u="none" strike="noStrike">
+                        <a:rPr lang="en-US" altLang="zh-CN" sz="1300" b="1" i="0" u="none" strike="noStrike" dirty="0">
                           <a:solidFill>
                             <a:srgbClr val="D81B60"/>
                           </a:solidFill>
                           <a:latin typeface="Noto Sans SC"/>
-                          <a:ea typeface="Noto Sans SC"/>
-                          <a:cs typeface="Noto Sans SC"/>
                           <a:sym typeface="Noto Sans SC"/>
                         </a:rPr>
-                        <a:t>95.7%</a:t>
+                        <a:t>79.86%</a:t>
                       </a:r>
-                      <a:endParaRPr lang="en-US" sz="1100"/>
+                      <a:endParaRPr lang="en-US" sz="1100" dirty="0"/>
                     </a:p>
                   </a:txBody>
                   <a:tcPr marL="101600" marR="101600" marT="101600" marB="101600">
@@ -14344,14 +14390,27 @@
                     <a:bodyPr/>
                     <a:lstStyle/>
                     <a:p>
-                      <a:pPr indent="0" algn="ctr">
+                      <a:pPr marL="0" marR="0" indent="0" algn="ctr" defTabSz="914400" rtl="0" eaLnBrk="1" fontAlgn="auto" latinLnBrk="0" hangingPunct="1">
                         <a:lnSpc>
                           <a:spcPct val="100000"/>
                         </a:lnSpc>
+                        <a:spcBef>
+                          <a:spcPts val="0"/>
+                        </a:spcBef>
+                        <a:spcAft>
+                          <a:spcPts val="0"/>
+                        </a:spcAft>
+                        <a:buClr>
+                          <a:srgbClr val="000000"/>
+                        </a:buClr>
+                        <a:buSzTx/>
+                        <a:buFont typeface="Arial" panose="020B0604020202090204"/>
+                        <a:buNone/>
+                        <a:tabLst/>
                         <a:defRPr/>
                       </a:pPr>
                       <a:r>
-                        <a:rPr lang="en-US" sz="1300" b="0" i="0" u="none" strike="noStrike">
+                        <a:rPr lang="en-US" sz="1300" b="0" i="0" u="none" strike="noStrike" dirty="0">
                           <a:solidFill>
                             <a:srgbClr val="37474F"/>
                           </a:solidFill>
@@ -14360,9 +14419,17 @@
                           <a:cs typeface="Noto Sans SC"/>
                           <a:sym typeface="Noto Sans SC"/>
                         </a:rPr>
+                        <a:t>l</a:t>
+                      </a:r>
+                      <a:r>
+                        <a:rPr lang="en" altLang="zh-CN" sz="1100" dirty="0" err="1"/>
                         <a:t>listedAt</a:t>
                       </a:r>
-                      <a:endParaRPr lang="en-US" sz="1100"/>
+                      <a:r>
+                        <a:rPr lang="en" altLang="zh-CN" sz="1100" dirty="0"/>
+                        <a:t> (publish time)</a:t>
+                      </a:r>
+                      <a:endParaRPr lang="en-US" sz="1100" dirty="0"/>
                     </a:p>
                   </a:txBody>
                   <a:tcPr marL="101600" marR="101600" marT="101600" marB="101600">
@@ -14443,7 +14510,7 @@
                         <a:defRPr/>
                       </a:pPr>
                       <a:r>
-                        <a:rPr lang="en-US" sz="1300" b="1" i="0" u="none" strike="noStrike">
+                        <a:rPr lang="en-US" sz="1300" b="1" i="0" u="none" strike="noStrike" dirty="0">
                           <a:solidFill>
                             <a:srgbClr val="388E3C"/>
                           </a:solidFill>
@@ -14454,7 +14521,7 @@
                         </a:rPr>
                         <a:t>0%</a:t>
                       </a:r>
-                      <a:endParaRPr lang="en-US" sz="1100"/>
+                      <a:endParaRPr lang="en-US" sz="1100" dirty="0"/>
                     </a:p>
                   </a:txBody>
                   <a:tcPr marL="101600" marR="101600" marT="101600" marB="101600">
@@ -14495,7 +14562,7 @@
         </p:nvSpPr>
         <p:spPr>
           <a:xfrm>
-            <a:off x="6604000" y="3683000"/>
+            <a:off x="6479309" y="3822700"/>
             <a:ext cx="4572000" cy="254000"/>
           </a:xfrm>
           <a:prstGeom prst="rect">
@@ -14519,7 +14586,7 @@
               <a:defRPr/>
             </a:pPr>
             <a:r>
-              <a:rPr lang="en-US" sz="1200" b="1" i="0" u="none" strike="noStrike">
+              <a:rPr lang="en-US" sz="1200" b="1" i="0" u="none" strike="noStrike" dirty="0">
                 <a:solidFill>
                   <a:srgbClr val="90A4AE"/>
                 </a:solidFill>
@@ -14530,7 +14597,7 @@
               </a:rPr>
               <a:t>Outlier Check:</a:t>
             </a:r>
-            <a:endParaRPr lang="en-US" sz="1100"/>
+            <a:endParaRPr lang="en-US" sz="1100" dirty="0"/>
           </a:p>
         </p:txBody>
       </p:sp>
@@ -14637,7 +14704,7 @@
               <a:defRPr/>
             </a:pPr>
             <a:r>
-              <a:rPr lang="en-US" sz="1100" b="1" i="0" u="none" strike="noStrike">
+              <a:rPr lang="en-US" sz="1100" b="1" i="0" u="none" strike="noStrike" dirty="0">
                 <a:solidFill>
                   <a:srgbClr val="37474F"/>
                 </a:solidFill>
@@ -14646,10 +14713,10 @@
                 <a:cs typeface="Noto Sans SC"/>
                 <a:sym typeface="Noto Sans SC"/>
               </a:rPr>
-              <a:t>Time Anomalies:</a:t>
+              <a:t>Time </a:t>
             </a:r>
             <a:r>
-              <a:rPr lang="en-US" sz="1100" b="0" i="0" u="none" strike="noStrike">
+              <a:rPr lang="en-US" sz="1100" b="1" i="0" u="none" strike="noStrike" dirty="0" err="1">
                 <a:solidFill>
                   <a:srgbClr val="37474F"/>
                 </a:solidFill>
@@ -14658,9 +14725,33 @@
                 <a:cs typeface="Noto Sans SC"/>
                 <a:sym typeface="Noto Sans SC"/>
               </a:rPr>
-              <a:t>None, all records are within the specified time range.</a:t>
+              <a:t>Anomalies:</a:t>
             </a:r>
-            <a:endParaRPr lang="en-US" sz="1100"/>
+            <a:r>
+              <a:rPr lang="en-US" sz="1100" b="0" i="0" u="none" strike="noStrike" dirty="0" err="1">
+                <a:solidFill>
+                  <a:srgbClr val="37474F"/>
+                </a:solidFill>
+                <a:latin typeface="Noto Sans SC"/>
+                <a:ea typeface="Noto Sans SC"/>
+                <a:cs typeface="Noto Sans SC"/>
+                <a:sym typeface="Noto Sans SC"/>
+              </a:rPr>
+              <a:t>None</a:t>
+            </a:r>
+            <a:r>
+              <a:rPr lang="en-US" sz="1100" b="0" i="0" u="none" strike="noStrike" dirty="0">
+                <a:solidFill>
+                  <a:srgbClr val="37474F"/>
+                </a:solidFill>
+                <a:latin typeface="Noto Sans SC"/>
+                <a:ea typeface="Noto Sans SC"/>
+                <a:cs typeface="Noto Sans SC"/>
+                <a:sym typeface="Noto Sans SC"/>
+              </a:rPr>
+              <a:t>, all records are within the specified time range.</a:t>
+            </a:r>
+            <a:endParaRPr lang="en-US" sz="1100" dirty="0"/>
           </a:p>
         </p:txBody>
       </p:sp>
@@ -14767,6 +14858,18 @@
               <a:defRPr/>
             </a:pPr>
             <a:r>
+              <a:rPr lang="en-US" sz="1100" b="1" i="0" u="none" strike="noStrike" dirty="0">
+                <a:solidFill>
+                  <a:srgbClr val="37474F"/>
+                </a:solidFill>
+                <a:latin typeface="Noto Sans SC"/>
+                <a:ea typeface="Noto Sans SC"/>
+                <a:cs typeface="Noto Sans SC"/>
+                <a:sym typeface="Noto Sans SC"/>
+              </a:rPr>
+              <a:t>Category </a:t>
+            </a:r>
+            <a:r>
               <a:rPr lang="en-US" sz="1100" b="1" i="0" u="none" strike="noStrike">
                 <a:solidFill>
                   <a:srgbClr val="37474F"/>
@@ -14776,7 +14879,7 @@
                 <a:cs typeface="Noto Sans SC"/>
                 <a:sym typeface="Noto Sans SC"/>
               </a:rPr>
-              <a:t>Category Anomalies:</a:t>
+              <a:t>Anomalies:</a:t>
             </a:r>
             <a:r>
               <a:rPr lang="en-US" sz="1100" b="0" i="0" u="none" strike="noStrike">
@@ -14897,7 +15000,7 @@
               <a:defRPr/>
             </a:pPr>
             <a:r>
-              <a:rPr lang="en-US" sz="1100" b="1" i="0" u="none" strike="noStrike">
+              <a:rPr lang="en-US" sz="1100" b="1" i="0" u="none" strike="noStrike" dirty="0">
                 <a:solidFill>
                   <a:srgbClr val="37474F"/>
                 </a:solidFill>
@@ -14906,10 +15009,10 @@
                 <a:cs typeface="Noto Sans SC"/>
                 <a:sym typeface="Noto Sans SC"/>
               </a:rPr>
-              <a:t>Salary Anomalies:</a:t>
+              <a:t>Salary </a:t>
             </a:r>
             <a:r>
-              <a:rPr lang="en-US" sz="1100" b="0" i="0" u="none" strike="noStrike">
+              <a:rPr lang="en-US" sz="1100" b="1" i="0" u="none" strike="noStrike" dirty="0" err="1">
                 <a:solidFill>
                   <a:srgbClr val="37474F"/>
                 </a:solidFill>
@@ -14918,9 +15021,33 @@
                 <a:cs typeface="Noto Sans SC"/>
                 <a:sym typeface="Noto Sans SC"/>
               </a:rPr>
-              <a:t>For positions with clear salary records, the range is in line with market levels with no extreme values.</a:t>
+              <a:t>Anomalies:</a:t>
             </a:r>
-            <a:endParaRPr lang="en-US" sz="1100"/>
+            <a:r>
+              <a:rPr lang="en-US" sz="1100" b="0" i="0" u="none" strike="noStrike" dirty="0" err="1">
+                <a:solidFill>
+                  <a:srgbClr val="37474F"/>
+                </a:solidFill>
+                <a:latin typeface="Noto Sans SC"/>
+                <a:ea typeface="Noto Sans SC"/>
+                <a:cs typeface="Noto Sans SC"/>
+                <a:sym typeface="Noto Sans SC"/>
+              </a:rPr>
+              <a:t>For</a:t>
+            </a:r>
+            <a:r>
+              <a:rPr lang="en-US" sz="1100" b="0" i="0" u="none" strike="noStrike" dirty="0">
+                <a:solidFill>
+                  <a:srgbClr val="37474F"/>
+                </a:solidFill>
+                <a:latin typeface="Noto Sans SC"/>
+                <a:ea typeface="Noto Sans SC"/>
+                <a:cs typeface="Noto Sans SC"/>
+                <a:sym typeface="Noto Sans SC"/>
+              </a:rPr>
+              <a:t> positions with clear salary records, the range is in line with market levels with no extreme values.</a:t>
+            </a:r>
+            <a:endParaRPr lang="en-US" sz="1100" dirty="0"/>
           </a:p>
         </p:txBody>
       </p:sp>
@@ -14998,7 +15125,7 @@
         </p:nvSpPr>
         <p:spPr>
           <a:xfrm>
-            <a:off x="0" y="0"/>
+            <a:off x="0" y="190500"/>
             <a:ext cx="12192000" cy="6858000"/>
           </a:xfrm>
           <a:prstGeom prst="roundRect">
@@ -15130,8 +15257,8 @@
         </p:nvSpPr>
         <p:spPr>
           <a:xfrm>
-            <a:off x="762000" y="1714500"/>
-            <a:ext cx="3429000" cy="1397000"/>
+            <a:off x="762000" y="1618374"/>
+            <a:ext cx="3556000" cy="1714500"/>
           </a:xfrm>
           <a:prstGeom prst="roundRect">
             <a:avLst>
@@ -15236,7 +15363,7 @@
               <a:defRPr/>
             </a:pPr>
             <a:r>
-              <a:rPr lang="en-US" sz="1600" b="1" i="0" u="none" strike="noStrike">
+              <a:rPr lang="en-US" sz="1600" b="1" i="0" u="none" strike="noStrike" dirty="0">
                 <a:solidFill>
                   <a:srgbClr val="0D47A1"/>
                 </a:solidFill>
@@ -15247,7 +15374,7 @@
               </a:rPr>
               <a:t>Industry &amp; Time Distribution</a:t>
             </a:r>
-            <a:endParaRPr lang="en-US" sz="1100"/>
+            <a:endParaRPr lang="en-US" sz="1100" dirty="0"/>
           </a:p>
         </p:txBody>
       </p:sp>
@@ -15259,8 +15386,8 @@
         </p:nvSpPr>
         <p:spPr>
           <a:xfrm>
-            <a:off x="952500" y="2286000"/>
-            <a:ext cx="3048000" cy="762000"/>
+            <a:off x="952500" y="2280526"/>
+            <a:ext cx="3238498" cy="830974"/>
           </a:xfrm>
           <a:prstGeom prst="rect">
             <a:avLst/>
@@ -15283,7 +15410,7 @@
               <a:defRPr/>
             </a:pPr>
             <a:r>
-              <a:rPr lang="en-US" sz="1200" b="0" i="0" u="none" strike="noStrike">
+              <a:rPr lang="en-US" sz="1100" b="0" i="0" u="none" strike="noStrike" dirty="0">
                 <a:solidFill>
                   <a:srgbClr val="455A64"/>
                 </a:solidFill>
@@ -15292,9 +15419,9 @@
                 <a:cs typeface="Noto Sans SC"/>
                 <a:sym typeface="Noto Sans SC"/>
               </a:rPr>
-              <a:t>IT and Finance industries have similar recruitment scales, with overall recruitment volume showing a quarterly upward trend.</a:t>
+              <a:t>IT and Finance industries maintain comparable recruitment scales (IT: 16,410 records, Finance: 12,682 records), with overall recruitment volume showing a steady quarterly upward trend from November 2025 to February 2026.</a:t>
             </a:r>
-            <a:endParaRPr lang="en-US" sz="1100"/>
+            <a:endParaRPr lang="en-US" sz="1100" dirty="0"/>
           </a:p>
         </p:txBody>
       </p:sp>
@@ -15306,8 +15433,8 @@
         </p:nvSpPr>
         <p:spPr>
           <a:xfrm>
-            <a:off x="4381500" y="1714500"/>
-            <a:ext cx="3429000" cy="1397000"/>
+            <a:off x="4419600" y="1618374"/>
+            <a:ext cx="3390900" cy="1683626"/>
           </a:xfrm>
           <a:prstGeom prst="roundRect">
             <a:avLst>
@@ -15452,14 +15579,11 @@
           <a:bodyPr vert="horz" wrap="square" lIns="0" tIns="0" rIns="0" bIns="0" rtlCol="0" anchor="ctr" anchorCtr="0"/>
           <a:lstStyle/>
           <a:p>
-            <a:pPr indent="0" algn="l">
-              <a:lnSpc>
-                <a:spcPct val="100000"/>
-              </a:lnSpc>
+            <a:pPr>
               <a:defRPr/>
             </a:pPr>
             <a:r>
-              <a:rPr lang="en-US" sz="1200" b="0" i="0" u="none" strike="noStrike">
+              <a:rPr lang="en-US" sz="1200" b="0" i="0" u="none" strike="noStrike" dirty="0">
                 <a:solidFill>
                   <a:srgbClr val="455A64"/>
                 </a:solidFill>
@@ -15468,33 +15592,8 @@
                 <a:cs typeface="Noto Sans SC"/>
                 <a:sym typeface="Noto Sans SC"/>
               </a:rPr>
-              <a:t>Full-time positions are absolutely dominant, accounting for as high as</a:t>
+              <a:t>Full-time positions are absolutely dominant, accounting for over 97% of total roles, with part-time and other employment types accounting for a very small proportion.</a:t>
             </a:r>
-            <a:r>
-              <a:rPr lang="en-US" sz="1200" b="1" i="0" u="none" strike="noStrike">
-                <a:solidFill>
-                  <a:srgbClr val="0D47A1"/>
-                </a:solidFill>
-                <a:latin typeface="Noto Sans SC"/>
-                <a:ea typeface="Noto Sans SC"/>
-                <a:cs typeface="Noto Sans SC"/>
-                <a:sym typeface="Noto Sans SC"/>
-              </a:rPr>
-              <a:t>97.6%</a:t>
-            </a:r>
-            <a:r>
-              <a:rPr lang="en-US" sz="1200" b="0" i="0" u="none" strike="noStrike">
-                <a:solidFill>
-                  <a:srgbClr val="455A64"/>
-                </a:solidFill>
-                <a:latin typeface="Noto Sans SC"/>
-                <a:ea typeface="Noto Sans SC"/>
-                <a:cs typeface="Noto Sans SC"/>
-                <a:sym typeface="Noto Sans SC"/>
-              </a:rPr>
-              <a:t>, with part-time and other types accounting for a small proportion.</a:t>
-            </a:r>
-            <a:endParaRPr lang="en-US" sz="1100"/>
           </a:p>
         </p:txBody>
       </p:sp>
@@ -15659,7 +15758,7 @@
               <a:defRPr/>
             </a:pPr>
             <a:r>
-              <a:rPr lang="en-US" sz="1200" b="0" i="0" u="none" strike="noStrike">
+              <a:rPr lang="en-US" sz="1200" b="0" i="0" u="none" strike="noStrike" dirty="0">
                 <a:solidFill>
                   <a:srgbClr val="455A64"/>
                 </a:solidFill>
@@ -15670,7 +15769,7 @@
               </a:rPr>
               <a:t>Mainly concentrated in core business districts such as Central and Tsim Sha Tsui, with highly concentrated geographical locations.</a:t>
             </a:r>
-            <a:endParaRPr lang="en-US" sz="1100"/>
+            <a:endParaRPr lang="en-US" sz="1100" dirty="0"/>
           </a:p>
         </p:txBody>
       </p:sp>
@@ -15729,8 +15828,8 @@
         </p:nvSpPr>
         <p:spPr>
           <a:xfrm>
-            <a:off x="762000" y="3873500"/>
-            <a:ext cx="3429000" cy="1397000"/>
+            <a:off x="712732" y="3683000"/>
+            <a:ext cx="3478267" cy="1905000"/>
           </a:xfrm>
           <a:prstGeom prst="roundRect">
             <a:avLst>
@@ -15759,7 +15858,7 @@
             <a:pPr algn="ctr">
               <a:defRPr/>
             </a:pPr>
-            <a:endParaRPr/>
+            <a:endParaRPr lang="zh-CN" altLang="en-US" dirty="0"/>
           </a:p>
         </p:txBody>
       </p:sp>
@@ -15828,7 +15927,7 @@
               <a:defRPr/>
             </a:pPr>
             <a:r>
-              <a:rPr lang="en-US" sz="1600" b="1" i="0" u="none" strike="noStrike">
+              <a:rPr lang="en-US" sz="1600" b="1" i="0" u="none" strike="noStrike" dirty="0">
                 <a:solidFill>
                   <a:srgbClr val="0D47A1"/>
                 </a:solidFill>
@@ -15839,7 +15938,7 @@
               </a:rPr>
               <a:t>Data Completeness</a:t>
             </a:r>
-            <a:endParaRPr lang="en-US" sz="1100"/>
+            <a:endParaRPr lang="en-US" sz="1100" dirty="0"/>
           </a:p>
         </p:txBody>
       </p:sp>
@@ -15851,8 +15950,8 @@
         </p:nvSpPr>
         <p:spPr>
           <a:xfrm>
-            <a:off x="952500" y="4445000"/>
-            <a:ext cx="3048000" cy="762000"/>
+            <a:off x="774262" y="4285374"/>
+            <a:ext cx="3353238" cy="1035926"/>
           </a:xfrm>
           <a:prstGeom prst="rect">
             <a:avLst/>
@@ -15868,25 +15967,26 @@
           <a:bodyPr vert="horz" wrap="square" lIns="0" tIns="0" rIns="0" bIns="0" rtlCol="0" anchor="ctr" anchorCtr="0"/>
           <a:lstStyle/>
           <a:p>
-            <a:pPr indent="0" algn="l">
+            <a:pPr indent="0" algn="just">
               <a:lnSpc>
                 <a:spcPct val="100000"/>
               </a:lnSpc>
               <a:defRPr/>
             </a:pPr>
             <a:r>
-              <a:rPr lang="en-US" sz="1200" b="0" i="0" u="none" strike="noStrike">
-                <a:solidFill>
-                  <a:srgbClr val="455A64"/>
-                </a:solidFill>
-                <a:latin typeface="Noto Sans SC"/>
-                <a:ea typeface="Noto Sans SC"/>
-                <a:cs typeface="Noto Sans SC"/>
-                <a:sym typeface="Noto Sans SC"/>
+              <a:rPr lang="en" altLang="zh-CN" sz="1100" dirty="0">
+                <a:latin typeface="Noto Sans Batak" panose="020B0502040504020204" pitchFamily="34" charset="0"/>
+                <a:cs typeface="Noto Nastaliq Urdu" panose="020B0502040504020204" pitchFamily="34" charset="-78"/>
               </a:rPr>
-              <a:t>Core business fields have high integrity; the lack of salary field does not affect major analysis dimensions.</a:t>
+              <a:t>Core business fields (location, publish time) have 100% completeness. The salary field has a missing rate of 79.86%, which does not affect the analysis of recruitment scale, time trend and location distribution</a:t>
             </a:r>
-            <a:endParaRPr lang="en-US" sz="1100"/>
+            <a:r>
+              <a:rPr lang="en" altLang="zh-CN" sz="1600" dirty="0">
+                <a:latin typeface="Noto Sans Batak" panose="020B0502040504020204" pitchFamily="34" charset="0"/>
+                <a:cs typeface="Noto Nastaliq Urdu" panose="020B0502040504020204" pitchFamily="34" charset="-78"/>
+              </a:rPr>
+              <a:t>.</a:t>
+            </a:r>
           </a:p>
         </p:txBody>
       </p:sp>
@@ -15898,8 +15998,8 @@
         </p:nvSpPr>
         <p:spPr>
           <a:xfrm>
-            <a:off x="4381500" y="3873500"/>
-            <a:ext cx="3429000" cy="1397000"/>
+            <a:off x="4240267" y="3637236"/>
+            <a:ext cx="3594100" cy="1905000"/>
           </a:xfrm>
           <a:prstGeom prst="roundRect">
             <a:avLst>
@@ -16044,7 +16144,7 @@
               <a:defRPr/>
             </a:pPr>
             <a:r>
-              <a:rPr lang="en-US" sz="1200" b="0" i="0" u="none" strike="noStrike">
+              <a:rPr lang="en-US" sz="1200" b="0" i="0" u="none" strike="noStrike" dirty="0">
                 <a:solidFill>
                   <a:srgbClr val="455A64"/>
                 </a:solidFill>
@@ -16055,7 +16155,7 @@
               </a:rPr>
               <a:t>Data quality is reliable with no obvious anomalies, supporting in-depth analysis.</a:t>
             </a:r>
-            <a:endParaRPr lang="en-US" sz="1100"/>
+            <a:endParaRPr lang="en-US" sz="1100" dirty="0"/>
           </a:p>
         </p:txBody>
       </p:sp>
@@ -16067,8 +16167,8 @@
         </p:nvSpPr>
         <p:spPr>
           <a:xfrm>
-            <a:off x="8001000" y="3873500"/>
-            <a:ext cx="3429000" cy="1397000"/>
+            <a:off x="7923267" y="3637017"/>
+            <a:ext cx="3721100" cy="1905000"/>
           </a:xfrm>
           <a:prstGeom prst="roundRect">
             <a:avLst>
@@ -16166,7 +16266,7 @@
               <a:defRPr/>
             </a:pPr>
             <a:r>
-              <a:rPr lang="en-US" sz="1600" b="1" i="0" u="none" strike="noStrike">
+              <a:rPr lang="en-US" sz="1600" b="1" i="0" u="none" strike="noStrike" dirty="0">
                 <a:solidFill>
                   <a:srgbClr val="0D47A1"/>
                 </a:solidFill>
@@ -16177,7 +16277,7 @@
               </a:rPr>
               <a:t>Data Characteristics</a:t>
             </a:r>
-            <a:endParaRPr lang="en-US" sz="1100"/>
+            <a:endParaRPr lang="en-US" sz="1100" dirty="0"/>
           </a:p>
         </p:txBody>
       </p:sp>
@@ -16189,8 +16289,8 @@
         </p:nvSpPr>
         <p:spPr>
           <a:xfrm>
-            <a:off x="8191500" y="4445000"/>
-            <a:ext cx="3048000" cy="762000"/>
+            <a:off x="8059465" y="4274864"/>
+            <a:ext cx="3413234" cy="1046436"/>
           </a:xfrm>
           <a:prstGeom prst="rect">
             <a:avLst/>
@@ -16206,14 +16306,14 @@
           <a:bodyPr vert="horz" wrap="square" lIns="0" tIns="0" rIns="0" bIns="0" rtlCol="0" anchor="ctr" anchorCtr="0"/>
           <a:lstStyle/>
           <a:p>
-            <a:pPr indent="0" algn="l">
+            <a:pPr indent="0" algn="just">
               <a:lnSpc>
                 <a:spcPct val="100000"/>
               </a:lnSpc>
               <a:defRPr/>
             </a:pPr>
             <a:r>
-              <a:rPr lang="en-US" sz="1200" b="0" i="0" u="none" strike="noStrike" dirty="0">
+              <a:rPr lang="en-US" sz="1100" b="0" i="0" u="none" strike="noStrike" dirty="0">
                 <a:solidFill>
                   <a:srgbClr val="455A64"/>
                 </a:solidFill>
@@ -16222,9 +16322,8 @@
                 <a:cs typeface="Noto Sans SC"/>
                 <a:sym typeface="Noto Sans SC"/>
               </a:rPr>
-              <a:t>Recruitment in Hong Kong's IT and Finance industries is dominated by full-time positions, concentrated in core business districts, with an upward trend in recruitment volume.</a:t>
+              <a:t>Recruitment in Hong Kong's IT and Finance industries (total 29,092 records) is dominated by full-time positions, concentrated in core business districts, with a continuous upward trend in monthly recruitment volume.</a:t>
             </a:r>
-            <a:endParaRPr lang="en-US" sz="1100" dirty="0"/>
           </a:p>
         </p:txBody>
       </p:sp>

--- a/7810 section2.pptx
+++ b/7810 section2.pptx
@@ -345,7 +345,7 @@
           <a:p>
             <a:fld id="{B7268E1E-0E44-426D-905E-8AD9B19D2182}" type="datetimeFigureOut">
               <a:rPr lang="cs-CZ" smtClean="0"/>
-              <a:t>01.04.2026</a:t>
+              <a:t>15.04.2026</a:t>
             </a:fld>
             <a:endParaRPr lang="cs-CZ"/>
           </a:p>
@@ -12605,7 +12605,7 @@
                 <a:cs typeface="Noto Sans SC"/>
                 <a:sym typeface="Noto Sans SC"/>
               </a:rPr>
-              <a:t>Analysis of IT and Finance Industry Recruitment Data in Hong Kong</a:t>
+              <a:t>Descriptive Analysis of Hong Kong IT &amp; Finance Job Market (2025–2026)</a:t>
             </a:r>
             <a:endParaRPr lang="en-US" sz="3200" dirty="0"/>
           </a:p>
@@ -12935,7 +12935,7 @@
                 <a:cs typeface="Noto Sans SC"/>
                 <a:sym typeface="Noto Sans SC"/>
               </a:rPr>
-              <a:t>Crawled from IT and Finance recruitment platforms in Hong Kong</a:t>
+              <a:t>This dataset was collected from Hong Kong IT and finance job platforms</a:t>
             </a:r>
             <a:endParaRPr lang="en-US" sz="1100"/>
           </a:p>
@@ -12949,7 +12949,7 @@
         </p:nvSpPr>
         <p:spPr>
           <a:xfrm>
-            <a:off x="1016000" y="2286000"/>
+            <a:off x="1016000" y="2516667"/>
             <a:ext cx="4572000" cy="304800"/>
           </a:xfrm>
           <a:prstGeom prst="rect">
@@ -12973,7 +12973,7 @@
               <a:defRPr/>
             </a:pPr>
             <a:r>
-              <a:rPr lang="en-US" sz="1200" b="1" i="0" u="none" strike="noStrike">
+              <a:rPr lang="en-US" sz="1200" b="1" i="0" u="none" strike="noStrike" dirty="0">
                 <a:solidFill>
                   <a:srgbClr val="90A4AE"/>
                 </a:solidFill>
@@ -12985,7 +12985,19 @@
               <a:t>Time Coverage:</a:t>
             </a:r>
             <a:r>
-              <a:rPr lang="en-US" sz="1200" b="0" i="0" u="none" strike="noStrike">
+              <a:rPr lang="zh-CN" altLang="en-US" sz="1200" b="1" i="0" u="none" strike="noStrike" dirty="0">
+                <a:solidFill>
+                  <a:srgbClr val="90A4AE"/>
+                </a:solidFill>
+                <a:latin typeface="Noto Sans SC"/>
+                <a:ea typeface="Noto Sans SC"/>
+                <a:cs typeface="Noto Sans SC"/>
+                <a:sym typeface="Noto Sans SC"/>
+              </a:rPr>
+              <a:t> </a:t>
+            </a:r>
+            <a:r>
+              <a:rPr lang="en-US" sz="1200" b="0" i="0" u="none" strike="noStrike" dirty="0">
                 <a:solidFill>
                   <a:srgbClr val="37474F"/>
                 </a:solidFill>
@@ -12994,9 +13006,33 @@
                 <a:cs typeface="Noto Sans SC"/>
                 <a:sym typeface="Noto Sans SC"/>
               </a:rPr>
-              <a:t>November 2025 - February 2026 (4 full months)</a:t>
+              <a:t>The main analysis focuses on November 2025 to February 2026, while the actual </a:t>
             </a:r>
-            <a:endParaRPr lang="en-US" sz="1100"/>
+            <a:r>
+              <a:rPr lang="en-US" sz="1200" b="0" i="0" u="none" strike="noStrike" dirty="0" err="1">
+                <a:solidFill>
+                  <a:srgbClr val="37474F"/>
+                </a:solidFill>
+                <a:latin typeface="Noto Sans SC"/>
+                <a:ea typeface="Noto Sans SC"/>
+                <a:cs typeface="Noto Sans SC"/>
+                <a:sym typeface="Noto Sans SC"/>
+              </a:rPr>
+              <a:t>listedAt</a:t>
+            </a:r>
+            <a:r>
+              <a:rPr lang="en-US" sz="1200" b="0" i="0" u="none" strike="noStrike" dirty="0">
+                <a:solidFill>
+                  <a:srgbClr val="37474F"/>
+                </a:solidFill>
+                <a:latin typeface="Noto Sans SC"/>
+                <a:ea typeface="Noto Sans SC"/>
+                <a:cs typeface="Noto Sans SC"/>
+                <a:sym typeface="Noto Sans SC"/>
+              </a:rPr>
+              <a:t> records range from October 2024 to February 2026</a:t>
+            </a:r>
+            <a:endParaRPr lang="en-US" sz="1100" dirty="0"/>
           </a:p>
         </p:txBody>
       </p:sp>
@@ -13008,7 +13044,7 @@
         </p:nvSpPr>
         <p:spPr>
           <a:xfrm>
-            <a:off x="1016000" y="2603500"/>
+            <a:off x="1016000" y="3016250"/>
             <a:ext cx="4572000" cy="304800"/>
           </a:xfrm>
           <a:prstGeom prst="rect">
@@ -13032,7 +13068,7 @@
               <a:defRPr/>
             </a:pPr>
             <a:r>
-              <a:rPr lang="en-US" sz="1200" b="1" i="0" u="none" strike="noStrike">
+              <a:rPr lang="en-US" sz="1200" b="1" i="0" u="none" strike="noStrike" dirty="0">
                 <a:solidFill>
                   <a:srgbClr val="90A4AE"/>
                 </a:solidFill>
@@ -13044,7 +13080,7 @@
               <a:t>File Composition:</a:t>
             </a:r>
             <a:r>
-              <a:rPr lang="en-US" sz="1200" b="0" i="0" u="none" strike="noStrike">
+              <a:rPr lang="en-US" sz="1200" b="0" i="0" u="none" strike="noStrike" dirty="0">
                 <a:solidFill>
                   <a:srgbClr val="37474F"/>
                 </a:solidFill>
@@ -13053,9 +13089,9 @@
                 <a:cs typeface="Noto Sans SC"/>
                 <a:sym typeface="Noto Sans SC"/>
               </a:rPr>
-              <a:t>8 datasets (4 for IT, 4 for Finance)</a:t>
+              <a:t>7 raw datasets in total, including 4 IT datasets and 3 finance datasets</a:t>
             </a:r>
-            <a:endParaRPr lang="en-US" sz="1100"/>
+            <a:endParaRPr lang="en-US" sz="1100" dirty="0"/>
           </a:p>
         </p:txBody>
       </p:sp>
@@ -13068,13 +13104,13 @@
           <p:nvPr>
             <p:extLst>
               <p:ext uri="{D42A27DB-BD31-4B8C-83A1-F6EECF244321}">
-                <p14:modId xmlns:p14="http://schemas.microsoft.com/office/powerpoint/2010/main" val="592930950"/>
+                <p14:modId xmlns:p14="http://schemas.microsoft.com/office/powerpoint/2010/main" val="3672824668"/>
               </p:ext>
             </p:extLst>
           </p:nvPr>
         </p:nvGraphicFramePr>
         <p:xfrm>
-          <a:off x="1016000" y="3048000"/>
+          <a:off x="1016000" y="3448050"/>
           <a:ext cx="4572000" cy="2247900"/>
         </p:xfrm>
         <a:graphic>
@@ -13389,7 +13425,7 @@
                           <a:cs typeface="Noto Sans SC"/>
                           <a:sym typeface="Noto Sans SC"/>
                         </a:rPr>
-                        <a:t>9</a:t>
+                        <a:t>8</a:t>
                       </a:r>
                       <a:endParaRPr lang="en-US" sz="1100" dirty="0"/>
                     </a:p>
@@ -13544,7 +13580,7 @@
                           <a:cs typeface="Noto Sans SC"/>
                           <a:sym typeface="Noto Sans SC"/>
                         </a:rPr>
-                        <a:t>9</a:t>
+                        <a:t>8</a:t>
                       </a:r>
                       <a:endParaRPr lang="en-US" sz="1100" dirty="0"/>
                     </a:p>
@@ -13699,7 +13735,7 @@
                           <a:cs typeface="Noto Sans SC"/>
                           <a:sym typeface="Noto Sans SC"/>
                         </a:rPr>
-                        <a:t>9</a:t>
+                        <a:t>8</a:t>
                       </a:r>
                       <a:endParaRPr lang="en-US" sz="1100" dirty="0"/>
                     </a:p>
@@ -13867,7 +13903,7 @@
         </p:nvSpPr>
         <p:spPr>
           <a:xfrm>
-            <a:off x="6604000" y="1968500"/>
+            <a:off x="6604000" y="1874345"/>
             <a:ext cx="4572000" cy="254000"/>
           </a:xfrm>
           <a:prstGeom prst="rect">
@@ -13891,7 +13927,7 @@
               <a:defRPr/>
             </a:pPr>
             <a:r>
-              <a:rPr lang="en-US" sz="1200" b="1" i="0" u="none" strike="noStrike">
+              <a:rPr lang="en-US" sz="1200" b="1" i="0" u="none" strike="noStrike" dirty="0">
                 <a:solidFill>
                   <a:srgbClr val="90A4AE"/>
                 </a:solidFill>
@@ -13902,7 +13938,7 @@
               </a:rPr>
               <a:t>Missing Value Statistics of Core Fields:</a:t>
             </a:r>
-            <a:endParaRPr lang="en-US" sz="1100"/>
+            <a:endParaRPr lang="en-US" sz="1100" dirty="0"/>
           </a:p>
         </p:txBody>
       </p:sp>
@@ -13915,13 +13951,13 @@
           <p:nvPr>
             <p:extLst>
               <p:ext uri="{D42A27DB-BD31-4B8C-83A1-F6EECF244321}">
-                <p14:modId xmlns:p14="http://schemas.microsoft.com/office/powerpoint/2010/main" val="3466053909"/>
+                <p14:modId xmlns:p14="http://schemas.microsoft.com/office/powerpoint/2010/main" val="4108194012"/>
               </p:ext>
             </p:extLst>
           </p:nvPr>
         </p:nvGraphicFramePr>
         <p:xfrm>
-          <a:off x="6477000" y="2204720"/>
+          <a:off x="6477000" y="2141045"/>
           <a:ext cx="4572000" cy="1772920"/>
         </p:xfrm>
         <a:graphic>
@@ -14111,7 +14147,7 @@
                         <a:defRPr/>
                       </a:pPr>
                       <a:r>
-                        <a:rPr lang="en-US" sz="1300" b="0" i="0" u="none" strike="noStrike">
+                        <a:rPr lang="en-US" sz="1300" b="0" i="0" u="none" strike="noStrike" dirty="0">
                           <a:solidFill>
                             <a:srgbClr val="37474F"/>
                           </a:solidFill>
@@ -14122,7 +14158,7 @@
                         </a:rPr>
                         <a:t>salary</a:t>
                       </a:r>
-                      <a:endParaRPr lang="en-US" sz="1100"/>
+                      <a:endParaRPr lang="en-US" sz="1100" dirty="0"/>
                     </a:p>
                   </a:txBody>
                   <a:tcPr marL="101600" marR="101600" marT="101600" marB="101600">
@@ -14419,15 +14455,11 @@
                           <a:cs typeface="Noto Sans SC"/>
                           <a:sym typeface="Noto Sans SC"/>
                         </a:rPr>
-                        <a:t>l</a:t>
+                        <a:t>Job posting time</a:t>
                       </a:r>
                       <a:r>
                         <a:rPr lang="en" altLang="zh-CN" sz="1100" dirty="0" err="1"/>
-                        <a:t>listedAt</a:t>
-                      </a:r>
-                      <a:r>
-                        <a:rPr lang="en" altLang="zh-CN" sz="1100" dirty="0"/>
-                        <a:t> (publish time)</a:t>
+                        <a:t> (listedAt)</a:t>
                       </a:r>
                       <a:endParaRPr lang="en-US" sz="1100" dirty="0"/>
                     </a:p>
@@ -14609,7 +14641,7 @@
         </p:nvSpPr>
         <p:spPr>
           <a:xfrm>
-            <a:off x="6604000" y="4000500"/>
+            <a:off x="6604000" y="4126581"/>
             <a:ext cx="4572000" cy="508000"/>
           </a:xfrm>
           <a:prstGeom prst="roundRect">
@@ -14713,10 +14745,10 @@
                 <a:cs typeface="Noto Sans SC"/>
                 <a:sym typeface="Noto Sans SC"/>
               </a:rPr>
-              <a:t>Time </a:t>
+              <a:t>Time Anomalies:</a:t>
             </a:r>
             <a:r>
-              <a:rPr lang="en-US" sz="1100" b="1" i="0" u="none" strike="noStrike" dirty="0" err="1">
+              <a:rPr lang="zh-CN" altLang="en-US" sz="1100" b="1" i="0" u="none" strike="noStrike" dirty="0">
                 <a:solidFill>
                   <a:srgbClr val="37474F"/>
                 </a:solidFill>
@@ -14725,19 +14757,7 @@
                 <a:cs typeface="Noto Sans SC"/>
                 <a:sym typeface="Noto Sans SC"/>
               </a:rPr>
-              <a:t>Anomalies:</a:t>
-            </a:r>
-            <a:r>
-              <a:rPr lang="en-US" sz="1100" b="0" i="0" u="none" strike="noStrike" dirty="0" err="1">
-                <a:solidFill>
-                  <a:srgbClr val="37474F"/>
-                </a:solidFill>
-                <a:latin typeface="Noto Sans SC"/>
-                <a:ea typeface="Noto Sans SC"/>
-                <a:cs typeface="Noto Sans SC"/>
-                <a:sym typeface="Noto Sans SC"/>
-              </a:rPr>
-              <a:t>None</a:t>
+              <a:t> </a:t>
             </a:r>
             <a:r>
               <a:rPr lang="en-US" sz="1100" b="0" i="0" u="none" strike="noStrike" dirty="0">
@@ -14749,7 +14769,7 @@
                 <a:cs typeface="Noto Sans SC"/>
                 <a:sym typeface="Noto Sans SC"/>
               </a:rPr>
-              <a:t>, all records are within the specified time range.</a:t>
+              <a:t>Some postings were published outside the main November 2025 to February 2026 analysis period.</a:t>
             </a:r>
             <a:endParaRPr lang="en-US" sz="1100" dirty="0"/>
           </a:p>
@@ -14763,7 +14783,7 @@
         </p:nvSpPr>
         <p:spPr>
           <a:xfrm>
-            <a:off x="6604000" y="4572000"/>
+            <a:off x="6604000" y="4684549"/>
             <a:ext cx="4572000" cy="508000"/>
           </a:xfrm>
           <a:prstGeom prst="roundRect">
@@ -14870,7 +14890,7 @@
               <a:t>Category </a:t>
             </a:r>
             <a:r>
-              <a:rPr lang="en-US" sz="1100" b="1" i="0" u="none" strike="noStrike">
+              <a:rPr lang="en-US" sz="1100" b="1" i="0" u="none" strike="noStrike" dirty="0" err="1">
                 <a:solidFill>
                   <a:srgbClr val="37474F"/>
                 </a:solidFill>
@@ -14882,7 +14902,7 @@
               <a:t>Anomalies:</a:t>
             </a:r>
             <a:r>
-              <a:rPr lang="en-US" sz="1100" b="0" i="0" u="none" strike="noStrike">
+              <a:rPr lang="en-US" sz="1100" b="0" i="0" u="none" strike="noStrike" dirty="0" err="1">
                 <a:solidFill>
                   <a:srgbClr val="37474F"/>
                 </a:solidFill>
@@ -14891,9 +14911,21 @@
                 <a:cs typeface="Noto Sans SC"/>
                 <a:sym typeface="Noto Sans SC"/>
               </a:rPr>
-              <a:t>None, location and classification fields are standardized and valid.</a:t>
+              <a:t>No</a:t>
             </a:r>
-            <a:endParaRPr lang="en-US" sz="1100"/>
+            <a:r>
+              <a:rPr lang="en-US" sz="1100" b="0" i="0" u="none" strike="noStrike" dirty="0">
+                <a:solidFill>
+                  <a:srgbClr val="37474F"/>
+                </a:solidFill>
+                <a:latin typeface="Noto Sans SC"/>
+                <a:ea typeface="Noto Sans SC"/>
+                <a:cs typeface="Noto Sans SC"/>
+                <a:sym typeface="Noto Sans SC"/>
+              </a:rPr>
+              <a:t> obvious category issues were found, and the location and classification fields are generally well standardized.</a:t>
+            </a:r>
+            <a:endParaRPr lang="en-US" sz="1100" dirty="0"/>
           </a:p>
         </p:txBody>
       </p:sp>
@@ -14905,7 +14937,7 @@
         </p:nvSpPr>
         <p:spPr>
           <a:xfrm>
-            <a:off x="6604000" y="5143500"/>
+            <a:off x="6604000" y="5250355"/>
             <a:ext cx="4572000" cy="508000"/>
           </a:xfrm>
           <a:prstGeom prst="roundRect">
@@ -15033,7 +15065,7 @@
                 <a:cs typeface="Noto Sans SC"/>
                 <a:sym typeface="Noto Sans SC"/>
               </a:rPr>
-              <a:t>For</a:t>
+              <a:t>Some potential outliers appear in the salary-related fields</a:t>
             </a:r>
             <a:r>
               <a:rPr lang="en-US" sz="1100" b="0" i="0" u="none" strike="noStrike" dirty="0">
@@ -15045,7 +15077,7 @@
                 <a:cs typeface="Noto Sans SC"/>
                 <a:sym typeface="Noto Sans SC"/>
               </a:rPr>
-              <a:t> positions with clear salary records, the range is in line with market levels with no extreme values.</a:t>
+              <a:t>, so extra cleaning is needed before doing detailed salary analysis.</a:t>
             </a:r>
             <a:endParaRPr lang="en-US" sz="1100" dirty="0"/>
           </a:p>
@@ -15125,7 +15157,7 @@
         </p:nvSpPr>
         <p:spPr>
           <a:xfrm>
-            <a:off x="0" y="190500"/>
+            <a:off x="19050" y="190500"/>
             <a:ext cx="12192000" cy="6858000"/>
           </a:xfrm>
           <a:prstGeom prst="roundRect">
@@ -15257,7 +15289,7 @@
         </p:nvSpPr>
         <p:spPr>
           <a:xfrm>
-            <a:off x="762000" y="1618374"/>
+            <a:off x="762000" y="1682750"/>
             <a:ext cx="3556000" cy="1714500"/>
           </a:xfrm>
           <a:prstGeom prst="roundRect">
@@ -15419,7 +15451,7 @@
                 <a:cs typeface="Noto Sans SC"/>
                 <a:sym typeface="Noto Sans SC"/>
               </a:rPr>
-              <a:t>IT and Finance industries maintain comparable recruitment scales (IT: 16,410 records, Finance: 12,682 records), with overall recruitment volume showing a steady quarterly upward trend from November 2025 to February 2026.</a:t>
+              <a:t>The IT and finance datasets are similar in size, with 16,410 IT records and 12,682 finance records. Most source files focus on November 2025 to February 2026, but some listedAt records are earlier than this period.</a:t>
             </a:r>
             <a:endParaRPr lang="en-US" sz="1100" dirty="0"/>
           </a:p>
@@ -15433,7 +15465,7 @@
         </p:nvSpPr>
         <p:spPr>
           <a:xfrm>
-            <a:off x="4419600" y="1618374"/>
+            <a:off x="4419600" y="1778000"/>
             <a:ext cx="3390900" cy="1683626"/>
           </a:xfrm>
           <a:prstGeom prst="roundRect">
@@ -15592,7 +15624,7 @@
                 <a:cs typeface="Noto Sans SC"/>
                 <a:sym typeface="Noto Sans SC"/>
               </a:rPr>
-              <a:t>Full-time positions are absolutely dominant, accounting for over 97% of total roles, with part-time and other employment types accounting for a very small proportion.</a:t>
+              <a:t>Full-time jobs clearly dominate the dataset, making up about 94.2% of all postings. Part-time and other work types account for only a small share.</a:t>
             </a:r>
           </a:p>
         </p:txBody>
@@ -15767,7 +15799,7 @@
                 <a:cs typeface="Noto Sans SC"/>
                 <a:sym typeface="Noto Sans SC"/>
               </a:rPr>
-              <a:t>Mainly concentrated in core business districts such as Central and Tsim Sha Tsui, with highly concentrated geographical locations.</a:t>
+              <a:t>Job opportunities are mainly concentrated in major business areas, especially Central and Tsim Sha Tsui, showing a clear geographic concentration.</a:t>
             </a:r>
             <a:endParaRPr lang="en-US" sz="1100" dirty="0"/>
           </a:p>
@@ -15828,7 +15860,7 @@
         </p:nvSpPr>
         <p:spPr>
           <a:xfrm>
-            <a:off x="712732" y="3683000"/>
+            <a:off x="712731" y="3805707"/>
             <a:ext cx="3478267" cy="1905000"/>
           </a:xfrm>
           <a:prstGeom prst="roundRect">
@@ -15978,7 +16010,7 @@
                 <a:latin typeface="Noto Sans Batak" panose="020B0502040504020204" pitchFamily="34" charset="0"/>
                 <a:cs typeface="Noto Nastaliq Urdu" panose="020B0502040504020204" pitchFamily="34" charset="-78"/>
               </a:rPr>
-              <a:t>Core business fields (location, publish time) have 100% completeness. The salary field has a missing rate of 79.86%, which does not affect the analysis of recruitment scale, time trend and location distribution</a:t>
+              <a:t>Important fields such as location and publish time are fully complete. The salary field has a missing rate of 79.86%, so this dataset is more suitable for analysing recruitment scale, timing, and location than for detailed salary analysis</a:t>
             </a:r>
             <a:r>
               <a:rPr lang="en" altLang="zh-CN" sz="1600" dirty="0">
@@ -15998,7 +16030,7 @@
         </p:nvSpPr>
         <p:spPr>
           <a:xfrm>
-            <a:off x="4240267" y="3637236"/>
+            <a:off x="4240267" y="3805707"/>
             <a:ext cx="3594100" cy="1905000"/>
           </a:xfrm>
           <a:prstGeom prst="roundRect">
@@ -16028,7 +16060,7 @@
             <a:pPr algn="ctr">
               <a:defRPr/>
             </a:pPr>
-            <a:endParaRPr/>
+            <a:endParaRPr dirty="0"/>
           </a:p>
         </p:txBody>
       </p:sp>
@@ -16153,7 +16185,7 @@
                 <a:cs typeface="Noto Sans SC"/>
                 <a:sym typeface="Noto Sans SC"/>
               </a:rPr>
-              <a:t>Data quality is reliable with no obvious anomalies, supporting in-depth analysis.</a:t>
+              <a:t>Overall, the data quality is good enough for exploratory analysis, but the time range and salary information still need to be interpreted carefully.</a:t>
             </a:r>
             <a:endParaRPr lang="en-US" sz="1100" dirty="0"/>
           </a:p>
@@ -16167,7 +16199,7 @@
         </p:nvSpPr>
         <p:spPr>
           <a:xfrm>
-            <a:off x="7923267" y="3637017"/>
+            <a:off x="7919426" y="3777807"/>
             <a:ext cx="3721100" cy="1905000"/>
           </a:xfrm>
           <a:prstGeom prst="roundRect">
@@ -16322,7 +16354,7 @@
                 <a:cs typeface="Noto Sans SC"/>
                 <a:sym typeface="Noto Sans SC"/>
               </a:rPr>
-              <a:t>Recruitment in Hong Kong's IT and Finance industries (total 29,092 records) is dominated by full-time positions, concentrated in core business districts, with a continuous upward trend in monthly recruitment volume.</a:t>
+              <a:t>Overall, Hong Kong IT and finance recruitment in this dataset is dominated by full-time roles and concentrated in core business districts. For time-based analysis, it is better to rely on the actual listedAt distribution instead of assuming a continuous upward trend.</a:t>
             </a:r>
           </a:p>
         </p:txBody>
